--- a/prezentacie/t04w.pptx
+++ b/prezentacie/t04w.pptx
@@ -250,7 +250,7 @@
           <a:p>
             <a:fld id="{10052495-8BC8-4CFB-94B1-B0429F101A0D}" type="datetimeFigureOut">
               <a:rPr lang="sk-SK" smtClean="0"/>
-              <a:t>20. 9. 2025</a:t>
+              <a:t>23. 9. 2026</a:t>
             </a:fld>
             <a:endParaRPr lang="sk-SK"/>
           </a:p>
@@ -420,7 +420,7 @@
           <a:p>
             <a:fld id="{10052495-8BC8-4CFB-94B1-B0429F101A0D}" type="datetimeFigureOut">
               <a:rPr lang="sk-SK" smtClean="0"/>
-              <a:t>20. 9. 2025</a:t>
+              <a:t>23. 9. 2026</a:t>
             </a:fld>
             <a:endParaRPr lang="sk-SK"/>
           </a:p>
@@ -600,7 +600,7 @@
           <a:p>
             <a:fld id="{10052495-8BC8-4CFB-94B1-B0429F101A0D}" type="datetimeFigureOut">
               <a:rPr lang="sk-SK" smtClean="0"/>
-              <a:t>20. 9. 2025</a:t>
+              <a:t>23. 9. 2026</a:t>
             </a:fld>
             <a:endParaRPr lang="sk-SK"/>
           </a:p>
@@ -770,7 +770,7 @@
           <a:p>
             <a:fld id="{10052495-8BC8-4CFB-94B1-B0429F101A0D}" type="datetimeFigureOut">
               <a:rPr lang="sk-SK" smtClean="0"/>
-              <a:t>20. 9. 2025</a:t>
+              <a:t>23. 9. 2026</a:t>
             </a:fld>
             <a:endParaRPr lang="sk-SK"/>
           </a:p>
@@ -1016,7 +1016,7 @@
           <a:p>
             <a:fld id="{10052495-8BC8-4CFB-94B1-B0429F101A0D}" type="datetimeFigureOut">
               <a:rPr lang="sk-SK" smtClean="0"/>
-              <a:t>20. 9. 2025</a:t>
+              <a:t>23. 9. 2026</a:t>
             </a:fld>
             <a:endParaRPr lang="sk-SK"/>
           </a:p>
@@ -1248,7 +1248,7 @@
           <a:p>
             <a:fld id="{10052495-8BC8-4CFB-94B1-B0429F101A0D}" type="datetimeFigureOut">
               <a:rPr lang="sk-SK" smtClean="0"/>
-              <a:t>20. 9. 2025</a:t>
+              <a:t>23. 9. 2026</a:t>
             </a:fld>
             <a:endParaRPr lang="sk-SK"/>
           </a:p>
@@ -1615,7 +1615,7 @@
           <a:p>
             <a:fld id="{10052495-8BC8-4CFB-94B1-B0429F101A0D}" type="datetimeFigureOut">
               <a:rPr lang="sk-SK" smtClean="0"/>
-              <a:t>20. 9. 2025</a:t>
+              <a:t>23. 9. 2026</a:t>
             </a:fld>
             <a:endParaRPr lang="sk-SK"/>
           </a:p>
@@ -1733,7 +1733,7 @@
           <a:p>
             <a:fld id="{10052495-8BC8-4CFB-94B1-B0429F101A0D}" type="datetimeFigureOut">
               <a:rPr lang="sk-SK" smtClean="0"/>
-              <a:t>20. 9. 2025</a:t>
+              <a:t>23. 9. 2026</a:t>
             </a:fld>
             <a:endParaRPr lang="sk-SK"/>
           </a:p>
@@ -1828,7 +1828,7 @@
           <a:p>
             <a:fld id="{10052495-8BC8-4CFB-94B1-B0429F101A0D}" type="datetimeFigureOut">
               <a:rPr lang="sk-SK" smtClean="0"/>
-              <a:t>20. 9. 2025</a:t>
+              <a:t>23. 9. 2026</a:t>
             </a:fld>
             <a:endParaRPr lang="sk-SK"/>
           </a:p>
@@ -2105,7 +2105,7 @@
           <a:p>
             <a:fld id="{10052495-8BC8-4CFB-94B1-B0429F101A0D}" type="datetimeFigureOut">
               <a:rPr lang="sk-SK" smtClean="0"/>
-              <a:t>20. 9. 2025</a:t>
+              <a:t>23. 9. 2026</a:t>
             </a:fld>
             <a:endParaRPr lang="sk-SK"/>
           </a:p>
@@ -2362,7 +2362,7 @@
           <a:p>
             <a:fld id="{10052495-8BC8-4CFB-94B1-B0429F101A0D}" type="datetimeFigureOut">
               <a:rPr lang="sk-SK" smtClean="0"/>
-              <a:t>20. 9. 2025</a:t>
+              <a:t>23. 9. 2026</a:t>
             </a:fld>
             <a:endParaRPr lang="sk-SK"/>
           </a:p>
@@ -2575,7 +2575,7 @@
           <a:p>
             <a:fld id="{10052495-8BC8-4CFB-94B1-B0429F101A0D}" type="datetimeFigureOut">
               <a:rPr lang="sk-SK" smtClean="0"/>
-              <a:t>20. 9. 2025</a:t>
+              <a:t>23. 9. 2026</a:t>
             </a:fld>
             <a:endParaRPr lang="sk-SK"/>
           </a:p>
@@ -3501,7 +3501,15 @@
             </a:br>
             <a:r>
               <a:rPr lang="sk-SK" b="1" dirty="0"/>
-              <a:t>Ing. Jozef Wagner PhD.</a:t>
+              <a:t>Ing. Jozef Wagner</a:t>
+            </a:r>
+            <a:r>
+              <a:rPr lang="en-US" b="1" dirty="0"/>
+              <a:t>,</a:t>
+            </a:r>
+            <a:r>
+              <a:rPr lang="sk-SK" b="1" dirty="0"/>
+              <a:t> PhD.</a:t>
             </a:r>
           </a:p>
           <a:p>
@@ -4183,14 +4191,35 @@
           <a:lstStyle/>
           <a:p>
             <a:r>
-              <a:rPr lang="sk-SK" sz="4000" dirty="0"/>
+              <a:rPr lang="sk-SK" sz="4000" dirty="0">
+                <a:solidFill>
+                  <a:srgbClr val="FF0000"/>
+                </a:solidFill>
+                <a:highlight>
+                  <a:srgbClr val="00FFFF"/>
+                </a:highlight>
+              </a:rPr>
               <a:t>Trieda - </a:t>
             </a:r>
             <a:r>
-              <a:rPr lang="sk-SK" sz="4000" dirty="0" err="1"/>
+              <a:rPr lang="sk-SK" sz="4000" dirty="0" err="1">
+                <a:solidFill>
+                  <a:srgbClr val="FF0000"/>
+                </a:solidFill>
+                <a:highlight>
+                  <a:srgbClr val="00FFFF"/>
+                </a:highlight>
+              </a:rPr>
               <a:t>Class</a:t>
             </a:r>
-            <a:endParaRPr lang="sk-SK" sz="4000" dirty="0"/>
+            <a:endParaRPr lang="sk-SK" sz="4000" dirty="0">
+              <a:solidFill>
+                <a:srgbClr val="FF0000"/>
+              </a:solidFill>
+              <a:highlight>
+                <a:srgbClr val="00FFFF"/>
+              </a:highlight>
+            </a:endParaRPr>
           </a:p>
         </p:txBody>
       </p:sp>
@@ -4229,7 +4258,14 @@
               <a:buNone/>
             </a:pPr>
             <a:r>
-              <a:rPr lang="sk-SK" dirty="0"/>
+              <a:rPr lang="sk-SK" dirty="0">
+                <a:solidFill>
+                  <a:srgbClr val="FF0000"/>
+                </a:solidFill>
+                <a:highlight>
+                  <a:srgbClr val="00FFFF"/>
+                </a:highlight>
+              </a:rPr>
               <a:t>Základný stavebný blok v Jave</a:t>
             </a:r>
           </a:p>
@@ -4241,7 +4277,14 @@
               <a:buNone/>
             </a:pPr>
             <a:r>
-              <a:rPr lang="sk-SK" dirty="0"/>
+              <a:rPr lang="sk-SK" dirty="0">
+                <a:solidFill>
+                  <a:srgbClr val="FF0000"/>
+                </a:solidFill>
+                <a:highlight>
+                  <a:srgbClr val="00FFFF"/>
+                </a:highlight>
+              </a:rPr>
               <a:t>„plán“ alebo „šablóna“, podľa ktorej sa vytvárajú objekty</a:t>
             </a:r>
           </a:p>
@@ -4457,53 +4500,137 @@
               <a:buNone/>
             </a:pPr>
             <a:r>
-              <a:rPr lang="sk-SK" dirty="0"/>
+              <a:rPr lang="sk-SK" dirty="0">
+                <a:solidFill>
+                  <a:srgbClr val="FF0000"/>
+                </a:solidFill>
+                <a:highlight>
+                  <a:srgbClr val="00FFFF"/>
+                </a:highlight>
+              </a:rPr>
               <a:t>Trieda obsahuje</a:t>
             </a:r>
           </a:p>
           <a:p>
             <a:pPr lvl="1"/>
             <a:r>
-              <a:rPr lang="sk-SK" sz="2800" b="1" dirty="0"/>
+              <a:rPr lang="sk-SK" sz="2800" b="1" dirty="0">
+                <a:solidFill>
+                  <a:srgbClr val="FF0000"/>
+                </a:solidFill>
+                <a:highlight>
+                  <a:srgbClr val="00FFFF"/>
+                </a:highlight>
+              </a:rPr>
               <a:t>atribúty</a:t>
             </a:r>
             <a:r>
-              <a:rPr lang="sk-SK" sz="2800" dirty="0"/>
+              <a:rPr lang="sk-SK" sz="2800" dirty="0">
+                <a:solidFill>
+                  <a:srgbClr val="FF0000"/>
+                </a:solidFill>
+                <a:highlight>
+                  <a:srgbClr val="00FFFF"/>
+                </a:highlight>
+              </a:rPr>
               <a:t> - </a:t>
             </a:r>
             <a:r>
-              <a:rPr lang="sk-SK" sz="2800" dirty="0" err="1"/>
+              <a:rPr lang="sk-SK" sz="2800" dirty="0" err="1">
+                <a:solidFill>
+                  <a:srgbClr val="FF0000"/>
+                </a:solidFill>
+                <a:highlight>
+                  <a:srgbClr val="00FFFF"/>
+                </a:highlight>
+              </a:rPr>
               <a:t>fields</a:t>
             </a:r>
-            <a:endParaRPr lang="sk-SK" sz="2800" dirty="0"/>
+            <a:endParaRPr lang="sk-SK" sz="2800" dirty="0">
+              <a:solidFill>
+                <a:srgbClr val="FF0000"/>
+              </a:solidFill>
+              <a:highlight>
+                <a:srgbClr val="00FFFF"/>
+              </a:highlight>
+            </a:endParaRPr>
           </a:p>
           <a:p>
             <a:pPr lvl="1"/>
             <a:r>
-              <a:rPr lang="sk-SK" sz="2800" b="1" dirty="0"/>
+              <a:rPr lang="sk-SK" sz="2800" b="1" dirty="0">
+                <a:solidFill>
+                  <a:srgbClr val="FF0000"/>
+                </a:solidFill>
+                <a:highlight>
+                  <a:srgbClr val="00FFFF"/>
+                </a:highlight>
+              </a:rPr>
               <a:t>metódy</a:t>
             </a:r>
             <a:r>
-              <a:rPr lang="sk-SK" sz="2800" dirty="0"/>
+              <a:rPr lang="sk-SK" sz="2800" dirty="0">
+                <a:solidFill>
+                  <a:srgbClr val="FF0000"/>
+                </a:solidFill>
+                <a:highlight>
+                  <a:srgbClr val="00FFFF"/>
+                </a:highlight>
+              </a:rPr>
               <a:t> - </a:t>
             </a:r>
             <a:r>
-              <a:rPr lang="sk-SK" sz="2800" dirty="0" err="1"/>
+              <a:rPr lang="sk-SK" sz="2800" dirty="0" err="1">
+                <a:solidFill>
+                  <a:srgbClr val="FF0000"/>
+                </a:solidFill>
+                <a:highlight>
+                  <a:srgbClr val="00FFFF"/>
+                </a:highlight>
+              </a:rPr>
               <a:t>methods</a:t>
             </a:r>
-            <a:endParaRPr lang="sk-SK" sz="2800" dirty="0"/>
+            <a:endParaRPr lang="sk-SK" sz="2800" dirty="0">
+              <a:solidFill>
+                <a:srgbClr val="FF0000"/>
+              </a:solidFill>
+              <a:highlight>
+                <a:srgbClr val="00FFFF"/>
+              </a:highlight>
+            </a:endParaRPr>
           </a:p>
           <a:p>
             <a:pPr lvl="1"/>
             <a:r>
-              <a:rPr lang="sk-SK" sz="2800" dirty="0"/>
+              <a:rPr lang="sk-SK" sz="2800" dirty="0">
+                <a:solidFill>
+                  <a:srgbClr val="FF0000"/>
+                </a:solidFill>
+                <a:highlight>
+                  <a:srgbClr val="00FFFF"/>
+                </a:highlight>
+              </a:rPr>
               <a:t>konštruktory - </a:t>
             </a:r>
             <a:r>
-              <a:rPr lang="sk-SK" sz="2800" dirty="0" err="1"/>
+              <a:rPr lang="sk-SK" sz="2800" dirty="0" err="1">
+                <a:solidFill>
+                  <a:srgbClr val="FF0000"/>
+                </a:solidFill>
+                <a:highlight>
+                  <a:srgbClr val="00FFFF"/>
+                </a:highlight>
+              </a:rPr>
               <a:t>constructors</a:t>
             </a:r>
-            <a:endParaRPr lang="sk-SK" sz="2800" dirty="0"/>
+            <a:endParaRPr lang="sk-SK" sz="2800" dirty="0">
+              <a:solidFill>
+                <a:srgbClr val="FF0000"/>
+              </a:solidFill>
+              <a:highlight>
+                <a:srgbClr val="00FFFF"/>
+              </a:highlight>
+            </a:endParaRPr>
           </a:p>
           <a:p>
             <a:pPr marL="0" indent="0">
@@ -4621,15 +4748,36 @@
           <a:lstStyle/>
           <a:p>
             <a:r>
-              <a:rPr lang="sk-SK" sz="4000" dirty="0"/>
+              <a:rPr lang="sk-SK" sz="4000" dirty="0">
+                <a:solidFill>
+                  <a:srgbClr val="FF0000"/>
+                </a:solidFill>
+                <a:highlight>
+                  <a:srgbClr val="00FFFF"/>
+                </a:highlight>
+              </a:rPr>
               <a:t>UML </a:t>
             </a:r>
             <a:r>
-              <a:rPr lang="sk-SK" sz="4000" dirty="0" err="1"/>
+              <a:rPr lang="sk-SK" sz="4000" dirty="0" err="1">
+                <a:solidFill>
+                  <a:srgbClr val="FF0000"/>
+                </a:solidFill>
+                <a:highlight>
+                  <a:srgbClr val="00FFFF"/>
+                </a:highlight>
+              </a:rPr>
               <a:t>Class</a:t>
             </a:r>
             <a:r>
-              <a:rPr lang="sk-SK" sz="4000" dirty="0"/>
+              <a:rPr lang="sk-SK" sz="4000" dirty="0">
+                <a:solidFill>
+                  <a:srgbClr val="FF0000"/>
+                </a:solidFill>
+                <a:highlight>
+                  <a:srgbClr val="00FFFF"/>
+                </a:highlight>
+              </a:rPr>
               <a:t> Diagram</a:t>
             </a:r>
           </a:p>
@@ -4670,7 +4818,14 @@
               <a:buNone/>
             </a:pPr>
             <a:r>
-              <a:rPr lang="sk-SK" dirty="0"/>
+              <a:rPr lang="sk-SK" dirty="0">
+                <a:solidFill>
+                  <a:srgbClr val="FF0000"/>
+                </a:solidFill>
+                <a:highlight>
+                  <a:srgbClr val="00FFFF"/>
+                </a:highlight>
+              </a:rPr>
               <a:t>Trieda je obdĺžnik s troma časťami</a:t>
             </a:r>
           </a:p>
@@ -4681,7 +4836,14 @@
               </a:spcBef>
             </a:pPr>
             <a:r>
-              <a:rPr lang="sk-SK" sz="2800" dirty="0"/>
+              <a:rPr lang="sk-SK" sz="2800" dirty="0">
+                <a:solidFill>
+                  <a:srgbClr val="FF0000"/>
+                </a:solidFill>
+                <a:highlight>
+                  <a:srgbClr val="00FFFF"/>
+                </a:highlight>
+              </a:rPr>
               <a:t>Názov</a:t>
             </a:r>
           </a:p>
@@ -4692,7 +4854,14 @@
               </a:spcBef>
             </a:pPr>
             <a:r>
-              <a:rPr lang="sk-SK" sz="2800" dirty="0"/>
+              <a:rPr lang="sk-SK" sz="2800" dirty="0">
+                <a:solidFill>
+                  <a:srgbClr val="FF0000"/>
+                </a:solidFill>
+                <a:highlight>
+                  <a:srgbClr val="00FFFF"/>
+                </a:highlight>
+              </a:rPr>
               <a:t>Atribúty</a:t>
             </a:r>
           </a:p>
@@ -4703,7 +4872,14 @@
               </a:spcBef>
             </a:pPr>
             <a:r>
-              <a:rPr lang="sk-SK" sz="2800" dirty="0"/>
+              <a:rPr lang="sk-SK" sz="2800" dirty="0">
+                <a:solidFill>
+                  <a:srgbClr val="FF0000"/>
+                </a:solidFill>
+                <a:highlight>
+                  <a:srgbClr val="00FFFF"/>
+                </a:highlight>
+              </a:rPr>
               <a:t>Metódy</a:t>
             </a:r>
           </a:p>
@@ -4998,14 +5174,35 @@
           <a:lstStyle/>
           <a:p>
             <a:r>
-              <a:rPr lang="sk-SK" sz="4000" dirty="0"/>
+              <a:rPr lang="sk-SK" sz="4000" dirty="0">
+                <a:solidFill>
+                  <a:srgbClr val="FF0000"/>
+                </a:solidFill>
+                <a:highlight>
+                  <a:srgbClr val="00FFFF"/>
+                </a:highlight>
+              </a:rPr>
               <a:t>Balíky tried - </a:t>
             </a:r>
             <a:r>
-              <a:rPr lang="sk-SK" sz="4000" dirty="0" err="1"/>
+              <a:rPr lang="sk-SK" sz="4000" dirty="0" err="1">
+                <a:solidFill>
+                  <a:srgbClr val="FF0000"/>
+                </a:solidFill>
+                <a:highlight>
+                  <a:srgbClr val="00FFFF"/>
+                </a:highlight>
+              </a:rPr>
               <a:t>packages</a:t>
             </a:r>
-            <a:endParaRPr lang="sk-SK" sz="4000" dirty="0"/>
+            <a:endParaRPr lang="sk-SK" sz="4000" dirty="0">
+              <a:solidFill>
+                <a:srgbClr val="FF0000"/>
+              </a:solidFill>
+              <a:highlight>
+                <a:srgbClr val="00FFFF"/>
+              </a:highlight>
+            </a:endParaRPr>
           </a:p>
         </p:txBody>
       </p:sp>
@@ -5045,6 +5242,9 @@
             </a:pPr>
             <a:r>
               <a:rPr lang="sk-SK" dirty="0" err="1">
+                <a:solidFill>
+                  <a:srgbClr val="FF0000"/>
+                </a:solidFill>
                 <a:highlight>
                   <a:srgbClr val="FFFF00"/>
                 </a:highlight>
@@ -5054,6 +5254,9 @@
             </a:r>
             <a:r>
               <a:rPr lang="sk-SK" dirty="0">
+                <a:solidFill>
+                  <a:srgbClr val="FF0000"/>
+                </a:solidFill>
                 <a:highlight>
                   <a:srgbClr val="FFFF00"/>
                 </a:highlight>
@@ -5063,6 +5266,9 @@
             </a:r>
             <a:r>
               <a:rPr lang="sk-SK" dirty="0" err="1">
+                <a:solidFill>
+                  <a:srgbClr val="FF0000"/>
+                </a:solidFill>
                 <a:highlight>
                   <a:srgbClr val="FFFF00"/>
                 </a:highlight>
@@ -5072,6 +5278,9 @@
             </a:r>
             <a:r>
               <a:rPr lang="sk-SK" dirty="0">
+                <a:solidFill>
+                  <a:srgbClr val="FF0000"/>
+                </a:solidFill>
                 <a:highlight>
                   <a:srgbClr val="FFFF00"/>
                 </a:highlight>
@@ -5106,7 +5315,14 @@
               <a:buNone/>
             </a:pPr>
             <a:r>
-              <a:rPr lang="sk-SK" dirty="0"/>
+              <a:rPr lang="sk-SK" dirty="0">
+                <a:solidFill>
+                  <a:srgbClr val="FF0000"/>
+                </a:solidFill>
+                <a:highlight>
+                  <a:srgbClr val="00FFFF"/>
+                </a:highlight>
+              </a:rPr>
               <a:t>Adresárová štruktúra musí byť rovnaká ako názov balíka</a:t>
             </a:r>
           </a:p>
@@ -5357,7 +5573,14 @@
           <a:lstStyle/>
           <a:p>
             <a:r>
-              <a:rPr lang="sk-SK" sz="4000" dirty="0"/>
+              <a:rPr lang="sk-SK" sz="4000" dirty="0">
+                <a:solidFill>
+                  <a:srgbClr val="FF0000"/>
+                </a:solidFill>
+                <a:highlight>
+                  <a:srgbClr val="00FFFF"/>
+                </a:highlight>
+              </a:rPr>
               <a:t>Modifikátory prístupu</a:t>
             </a:r>
           </a:p>
@@ -5423,6 +5646,9 @@
             </a:pPr>
             <a:r>
               <a:rPr lang="sk-SK" sz="2800" dirty="0" err="1">
+                <a:solidFill>
+                  <a:srgbClr val="FF0000"/>
+                </a:solidFill>
                 <a:highlight>
                   <a:srgbClr val="FFFF00"/>
                 </a:highlight>
@@ -5431,7 +5657,14 @@
               <a:t>public</a:t>
             </a:r>
             <a:r>
-              <a:rPr lang="sk-SK" sz="2800" dirty="0"/>
+              <a:rPr lang="sk-SK" sz="2800" dirty="0">
+                <a:solidFill>
+                  <a:srgbClr val="FF0000"/>
+                </a:solidFill>
+                <a:highlight>
+                  <a:srgbClr val="00FFFF"/>
+                </a:highlight>
+              </a:rPr>
               <a:t> - verejný prístup z akejkoľvek triedy</a:t>
             </a:r>
           </a:p>
@@ -5443,6 +5676,9 @@
             </a:pPr>
             <a:r>
               <a:rPr lang="sk-SK" sz="2800" dirty="0" err="1">
+                <a:solidFill>
+                  <a:srgbClr val="FF0000"/>
+                </a:solidFill>
                 <a:highlight>
                   <a:srgbClr val="FFFF00"/>
                 </a:highlight>
@@ -5451,7 +5687,14 @@
               <a:t>private</a:t>
             </a:r>
             <a:r>
-              <a:rPr lang="sk-SK" sz="2800" dirty="0"/>
+              <a:rPr lang="sk-SK" sz="2800" dirty="0">
+                <a:solidFill>
+                  <a:srgbClr val="FF0000"/>
+                </a:solidFill>
+                <a:highlight>
+                  <a:srgbClr val="00FFFF"/>
+                </a:highlight>
+              </a:rPr>
               <a:t> - prístup má iba sama trieda</a:t>
             </a:r>
           </a:p>
@@ -5462,11 +5705,25 @@
               </a:spcBef>
             </a:pPr>
             <a:r>
-              <a:rPr lang="sk-SK" sz="2800" i="1" dirty="0"/>
+              <a:rPr lang="sk-SK" sz="2800" i="1" dirty="0">
+                <a:solidFill>
+                  <a:srgbClr val="FF0000"/>
+                </a:solidFill>
+                <a:highlight>
+                  <a:srgbClr val="00FFFF"/>
+                </a:highlight>
+              </a:rPr>
               <a:t>bez modifikátora</a:t>
             </a:r>
             <a:r>
-              <a:rPr lang="sk-SK" sz="2800" dirty="0"/>
+              <a:rPr lang="sk-SK" sz="2800" dirty="0">
+                <a:solidFill>
+                  <a:srgbClr val="FF0000"/>
+                </a:solidFill>
+                <a:highlight>
+                  <a:srgbClr val="00FFFF"/>
+                </a:highlight>
+              </a:rPr>
               <a:t> - prístup je dovolený iba v rámci toho istého balíka</a:t>
             </a:r>
           </a:p>
